--- a/docs/marketing/Borocean-Sunum.pptx
+++ b/docs/marketing/Borocean-Sunum.pptx
@@ -2768,7 +2768,7 @@
                 <a:ea typeface="Calibri" pitchFamily="34" charset="-122"/>
                 <a:cs typeface="Calibri" pitchFamily="34" charset="-120"/>
               </a:rPr>
-              <a:t>Günün Skoru: her gün 1 BIST + 1 ABD hissesinin özet skoru, linkle</a:t>
+              <a:t>Günün Verisi: her gün bir sektörün kamuya açık metrik özeti, linkle</a:t>
             </a:r>
             <a:endParaRPr lang="en-US" sz="1100" dirty="0"/>
           </a:p>
@@ -5537,7 +5537,7 @@
                 <a:ea typeface="Calibri" pitchFamily="34" charset="-122"/>
                 <a:cs typeface="Calibri" pitchFamily="34" charset="-120"/>
               </a:rPr>
-              <a:t>Açık madde — yatırımcı sunumundan önce kapatılmalı</a:t>
+              <a:t>Uyum durumu — Eylül 2026</a:t>
             </a:r>
             <a:endParaRPr lang="en-US" sz="1350" dirty="0"/>
           </a:p>
@@ -5579,7 +5579,7 @@
                 <a:ea typeface="Calibri" pitchFamily="34" charset="-122"/>
                 <a:cs typeface="Calibri" pitchFamily="34" charset="-120"/>
               </a:rPr>
-              <a:t>“Örüntü/sinyal bulgusu” dilinin, ABD (SEC/FINRA) ve Türkiye (SPK) yatırım danışmanlığı düzenlemelerine tabi olmama sınırının dışında kalmak için hukuken yeterli olup olmadığı bir hukuk danışmanıyla teyit edilmeli. Bu, hem mevcut sinyal motorunun hem de Epic 9'daki AI yorum katmanının dayandığı temel bir varsayım.</a:t>
+              <a:t>SPK rehberine göre kişiye yönelik al/sat/tut yönlendirmesi yatırım danışmanlığıdır. Borocean'da al/sat etiketi yoktur; AI raporları yalnızca kamuya açık veriyi analiz eder, kişisel öneri üretmez. KVKK aydınlatma metni ve uygulama içi hesap silme mevcuttur. Nihai hukuki görüş yine de alınmalıdır.</a:t>
             </a:r>
             <a:endParaRPr lang="en-US" sz="1150" dirty="0"/>
           </a:p>
@@ -9416,7 +9416,7 @@
                 <a:ea typeface="Calibri" pitchFamily="34" charset="-122"/>
                 <a:cs typeface="Calibri" pitchFamily="34" charset="-120"/>
               </a:rPr>
-              <a:t>Kural Bazlı Skor</a:t>
+              <a:t>Kural Bazlı Puan</a:t>
             </a:r>
             <a:endParaRPr lang="en-US" sz="1500" dirty="0"/>
           </a:p>
@@ -9458,7 +9458,7 @@
                 <a:ea typeface="Calibri" pitchFamily="34" charset="-122"/>
                 <a:cs typeface="Calibri" pitchFamily="34" charset="-120"/>
               </a:rPr>
-              <a:t>0-100 skor + Al/Nötr/Sat etiketi. Temel + teknik sinyallerin deterministik birleşimi.</a:t>
+              <a:t>0-100 metrik puanı + kategori dökümü; al/sat etiketi yok. Temel + teknik sinyallerin deterministik birleşimi.</a:t>
             </a:r>
             <a:endParaRPr lang="en-US" sz="1150" dirty="0"/>
           </a:p>
@@ -13038,7 +13038,7 @@
                 <a:ea typeface="Calibri" pitchFamily="34" charset="-122"/>
                 <a:cs typeface="Calibri" pitchFamily="34" charset="-120"/>
               </a:rPr>
-              <a:t>Kendi kriterlerine uyan fırsatları taramak, çoklu indikatörle teyit almak, hisseleri yan yana kıyaslamak.</a:t>
+              <a:t>Kendi kriterlerine uyan hisseleri taramak, çoklu indikatörle teyit almak, hisseleri yan yana kıyaslamak.</a:t>
             </a:r>
             <a:endParaRPr lang="en-US" sz="1100" dirty="0"/>
           </a:p>
